--- a/scripts/streaming_demo_output/streaming_deck.pptx
+++ b/scripts/streaming_demo_output/streaming_deck.pptx
@@ -9,6 +9,7 @@
     <p:sldId id="257" r:id="rId8"/>
     <p:sldId id="258" r:id="rId9"/>
     <p:sldId id="259" r:id="rId10"/>
+    <p:sldId id="260" r:id="rId11"/>
   </p:sldIdLst>
   <p:sldSz cx="12191695" cy="6858000" type="screen4x3"/>
   <p:notesSz cx="6858000" cy="9144000"/>
@@ -3376,6 +3377,118 @@
               </a:defRPr>
             </a:pPr>
             <a:r>
+              <a:t>How it runs</a:t>
+            </a:r>
+          </a:p>
+        </p:txBody>
+      </p:sp>
+      <p:pic>
+        <p:nvPicPr>
+          <p:cNvPr id="3" name="Picture 2" descr="sequence.png"/>
+          <p:cNvPicPr>
+            <a:picLocks noChangeAspect="1"/>
+          </p:cNvPicPr>
+          <p:nvPr/>
+        </p:nvPicPr>
+        <p:blipFill>
+          <a:blip r:embed="rId2"/>
+          <a:stretch>
+            <a:fillRect/>
+          </a:stretch>
+        </p:blipFill>
+        <p:spPr>
+          <a:xfrm>
+            <a:off x="548640" y="777240"/>
+            <a:ext cx="11064240" cy="5693522"/>
+          </a:xfrm>
+          <a:prstGeom prst="rect">
+            <a:avLst/>
+          </a:prstGeom>
+        </p:spPr>
+      </p:pic>
+      <p:sp>
+        <p:nvSpPr>
+          <p:cNvPr id="4" name="TextBox 3"/>
+          <p:cNvSpPr txBox="1"/>
+          <p:nvPr/>
+        </p:nvSpPr>
+        <p:spPr>
+          <a:xfrm>
+            <a:off x="457200" y="6309360"/>
+            <a:ext cx="11247120" cy="457200"/>
+          </a:xfrm>
+          <a:prstGeom prst="rect">
+            <a:avLst/>
+          </a:prstGeom>
+          <a:noFill/>
+        </p:spPr>
+        <p:txBody>
+          <a:bodyPr wrap="square">
+            <a:spAutoFit/>
+          </a:bodyPr>
+          <a:lstStyle/>
+          <a:p>
+            <a:pPr>
+              <a:defRPr sz="1200" b="0">
+                <a:solidFill>
+                  <a:srgbClr val="8792A8"/>
+                </a:solidFill>
+              </a:defRPr>
+            </a:pPr>
+            <a:r>
+              <a:t>The per-window call is the same before and after the second channel joins; only the recording list changes.</a:t>
+            </a:r>
+          </a:p>
+        </p:txBody>
+      </p:sp>
+    </p:spTree>
+  </p:cSld>
+  <p:clrMapOvr>
+    <a:masterClrMapping/>
+  </p:clrMapOvr>
+</p:sld>
+</file>
+
+<file path=ppt/slides/slide4.xml><?xml version="1.0" encoding="utf-8"?>
+<p:sld xmlns:a="http://schemas.openxmlformats.org/drawingml/2006/main" xmlns:p="http://schemas.openxmlformats.org/presentationml/2006/main" xmlns:r="http://schemas.openxmlformats.org/officeDocument/2006/relationships">
+  <p:cSld>
+    <p:spTree>
+      <p:nvGrpSpPr>
+        <p:cNvPr id="1" name=""/>
+        <p:cNvGrpSpPr/>
+        <p:nvPr/>
+      </p:nvGrpSpPr>
+      <p:grpSpPr/>
+      <p:sp>
+        <p:nvSpPr>
+          <p:cNvPr id="2" name="TextBox 1"/>
+          <p:cNvSpPr txBox="1"/>
+          <p:nvPr/>
+        </p:nvSpPr>
+        <p:spPr>
+          <a:xfrm>
+            <a:off x="457200" y="201168"/>
+            <a:ext cx="11247120" cy="457200"/>
+          </a:xfrm>
+          <a:prstGeom prst="rect">
+            <a:avLst/>
+          </a:prstGeom>
+          <a:noFill/>
+        </p:spPr>
+        <p:txBody>
+          <a:bodyPr wrap="square">
+            <a:spAutoFit/>
+          </a:bodyPr>
+          <a:lstStyle/>
+          <a:p>
+            <a:pPr>
+              <a:defRPr sz="2400" b="1">
+                <a:solidFill>
+                  <a:srgbClr val="1B2333"/>
+                </a:solidFill>
+              </a:defRPr>
+            </a:pPr>
+            <a:r>
               <a:t>Backup: reading three depths at once</a:t>
             </a:r>
           </a:p>
@@ -3479,7 +3592,7 @@
 </p:sld>
 </file>
 
-<file path=ppt/slides/slide4.xml><?xml version="1.0" encoding="utf-8"?>
+<file path=ppt/slides/slide5.xml><?xml version="1.0" encoding="utf-8"?>
 <p:sld xmlns:a="http://schemas.openxmlformats.org/drawingml/2006/main" xmlns:p="http://schemas.openxmlformats.org/presentationml/2006/main" xmlns:r="http://schemas.openxmlformats.org/officeDocument/2006/relationships">
   <p:cSld>
     <p:spTree>

--- a/scripts/streaming_demo_output/streaming_deck.pptx
+++ b/scripts/streaming_demo_output/streaming_deck.pptx
@@ -10,6 +10,7 @@
     <p:sldId id="258" r:id="rId9"/>
     <p:sldId id="259" r:id="rId10"/>
     <p:sldId id="260" r:id="rId11"/>
+    <p:sldId id="261" r:id="rId12"/>
   </p:sldIdLst>
   <p:sldSz cx="12191695" cy="6858000" type="screen4x3"/>
   <p:notesSz cx="6858000" cy="9144000"/>
@@ -3489,6 +3490,567 @@
               </a:defRPr>
             </a:pPr>
             <a:r>
+              <a:t>The actual code</a:t>
+            </a:r>
+          </a:p>
+        </p:txBody>
+      </p:sp>
+      <p:sp>
+        <p:nvSpPr>
+          <p:cNvPr id="3" name="TextBox 2"/>
+          <p:cNvSpPr txBox="1"/>
+          <p:nvPr/>
+        </p:nvSpPr>
+        <p:spPr>
+          <a:xfrm>
+            <a:off x="502920" y="777240"/>
+            <a:ext cx="5577840" cy="2286000"/>
+          </a:xfrm>
+          <a:prstGeom prst="rect">
+            <a:avLst/>
+          </a:prstGeom>
+          <a:noFill/>
+        </p:spPr>
+        <p:txBody>
+          <a:bodyPr wrap="square">
+            <a:spAutoFit/>
+          </a:bodyPr>
+          <a:lstStyle/>
+          <a:p>
+            <a:pPr>
+              <a:defRPr sz="1050">
+                <a:solidFill>
+                  <a:srgbClr val="8792A8"/>
+                </a:solidFill>
+                <a:latin typeface="Menlo"/>
+              </a:defRPr>
+            </a:pPr>
+            <a:r>
+              <a:t># unified/scripts/render_streaming_representation.py</a:t>
+            </a:r>
+          </a:p>
+          <a:p>
+            <a:pPr>
+              <a:defRPr sz="1050">
+                <a:solidFill>
+                  <a:srgbClr val="1B2333"/>
+                </a:solidFill>
+                <a:latin typeface="Menlo"/>
+              </a:defRPr>
+            </a:pPr>
+          </a:p>
+          <a:p>
+            <a:pPr>
+              <a:defRPr sz="1050">
+                <a:solidFill>
+                  <a:srgbClr val="1B2333"/>
+                </a:solidFill>
+                <a:latin typeface="Menlo"/>
+              </a:defRPr>
+            </a:pPr>
+            <a:r>
+              <a:t>session = WindowedStreamSession(</a:t>
+            </a:r>
+          </a:p>
+          <a:p>
+            <a:pPr>
+              <a:defRPr sz="1050">
+                <a:solidFill>
+                  <a:srgbClr val="1B2333"/>
+                </a:solidFill>
+                <a:latin typeface="Menlo"/>
+              </a:defRPr>
+            </a:pPr>
+            <a:r>
+              <a:t>    decode_frames(video_path), fps=fps,</a:t>
+            </a:r>
+          </a:p>
+          <a:p>
+            <a:pPr>
+              <a:defRPr sz="1050">
+                <a:solidFill>
+                  <a:srgbClr val="1B2333"/>
+                </a:solidFill>
+                <a:latin typeface="Menlo"/>
+              </a:defRPr>
+            </a:pPr>
+            <a:r>
+              <a:t>    window_ms=2000, stride_ms=500,</a:t>
+            </a:r>
+          </a:p>
+          <a:p>
+            <a:pPr>
+              <a:defRPr sz="1050">
+                <a:solidFill>
+                  <a:srgbClr val="1B2333"/>
+                </a:solidFill>
+                <a:latin typeface="Menlo"/>
+              </a:defRPr>
+            </a:pPr>
+            <a:r>
+              <a:t>    record='video_mid',</a:t>
+            </a:r>
+          </a:p>
+          <a:p>
+            <a:pPr>
+              <a:defRPr sz="1050">
+                <a:solidFill>
+                  <a:srgbClr val="1B2333"/>
+                </a:solidFill>
+                <a:latin typeface="Menlo"/>
+              </a:defRPr>
+            </a:pPr>
+            <a:r>
+              <a:t>    window_to_stimuli=window_to_stimuli)</a:t>
+            </a:r>
+          </a:p>
+          <a:p>
+            <a:pPr>
+              <a:defRPr sz="1050">
+                <a:solidFill>
+                  <a:srgbClr val="1B2333"/>
+                </a:solidFill>
+                <a:latin typeface="Menlo"/>
+              </a:defRPr>
+            </a:pPr>
+          </a:p>
+          <a:p>
+            <a:pPr>
+              <a:defRPr sz="1050">
+                <a:solidFill>
+                  <a:srgbClr val="1B2333"/>
+                </a:solidFill>
+                <a:latin typeface="Menlo"/>
+              </a:defRPr>
+            </a:pPr>
+            <a:r>
+              <a:t>model.start_recording('video_mid')</a:t>
+            </a:r>
+          </a:p>
+          <a:p>
+            <a:pPr>
+              <a:defRPr sz="1050">
+                <a:solidFill>
+                  <a:srgbClr val="1B2333"/>
+                </a:solidFill>
+                <a:latin typeface="Menlo"/>
+              </a:defRPr>
+            </a:pPr>
+            <a:r>
+              <a:t>_drive_neural_session_streaming(model, session)</a:t>
+            </a:r>
+          </a:p>
+        </p:txBody>
+      </p:sp>
+      <p:sp>
+        <p:nvSpPr>
+          <p:cNvPr id="4" name="TextBox 3"/>
+          <p:cNvSpPr txBox="1"/>
+          <p:nvPr/>
+        </p:nvSpPr>
+        <p:spPr>
+          <a:xfrm>
+            <a:off x="502920" y="3063240"/>
+            <a:ext cx="5577840" cy="3017520"/>
+          </a:xfrm>
+          <a:prstGeom prst="rect">
+            <a:avLst/>
+          </a:prstGeom>
+          <a:noFill/>
+        </p:spPr>
+        <p:txBody>
+          <a:bodyPr wrap="square">
+            <a:spAutoFit/>
+          </a:bodyPr>
+          <a:lstStyle/>
+          <a:p>
+            <a:pPr>
+              <a:defRPr sz="1050">
+                <a:solidFill>
+                  <a:srgbClr val="8792A8"/>
+                </a:solidFill>
+                <a:latin typeface="Menlo"/>
+              </a:defRPr>
+            </a:pPr>
+            <a:r>
+              <a:t># core/brainscore_core/streaming_helpers.py</a:t>
+            </a:r>
+          </a:p>
+          <a:p>
+            <a:pPr>
+              <a:defRPr sz="1050">
+                <a:solidFill>
+                  <a:srgbClr val="8792A8"/>
+                </a:solidFill>
+                <a:latin typeface="Menlo"/>
+              </a:defRPr>
+            </a:pPr>
+            <a:r>
+              <a:t>#   _drive_neural_session_streaming</a:t>
+            </a:r>
+          </a:p>
+          <a:p>
+            <a:pPr>
+              <a:defRPr sz="1050">
+                <a:solidFill>
+                  <a:srgbClr val="1B2333"/>
+                </a:solidFill>
+                <a:latin typeface="Menlo"/>
+              </a:defRPr>
+            </a:pPr>
+          </a:p>
+          <a:p>
+            <a:pPr>
+              <a:defRPr sz="1050">
+                <a:solidFill>
+                  <a:srgbClr val="1B2333"/>
+                </a:solidFill>
+                <a:latin typeface="Menlo"/>
+              </a:defRPr>
+            </a:pPr>
+            <a:r>
+              <a:t>event = session.next_input()</a:t>
+            </a:r>
+          </a:p>
+          <a:p>
+            <a:pPr>
+              <a:defRPr sz="1050">
+                <a:solidFill>
+                  <a:srgbClr val="1B2333"/>
+                </a:solidFill>
+                <a:latin typeface="Menlo"/>
+              </a:defRPr>
+            </a:pPr>
+            <a:r>
+              <a:t>while event is not None:</a:t>
+            </a:r>
+          </a:p>
+          <a:p>
+            <a:pPr>
+              <a:defRPr sz="1050">
+                <a:solidFill>
+                  <a:srgbClr val="1B2333"/>
+                </a:solidFill>
+                <a:latin typeface="Menlo"/>
+              </a:defRPr>
+            </a:pPr>
+            <a:r>
+              <a:t>    stimuli = _one_row_stimuli(session, event, stream_index)</a:t>
+            </a:r>
+          </a:p>
+          <a:p>
+            <a:pPr>
+              <a:defRPr sz="1050">
+                <a:solidFill>
+                  <a:srgbClr val="1B2333"/>
+                </a:solidFill>
+                <a:latin typeface="Menlo"/>
+              </a:defRPr>
+            </a:pPr>
+            <a:r>
+              <a:t>    for channel, region in regions:</a:t>
+            </a:r>
+          </a:p>
+          <a:p>
+            <a:pPr>
+              <a:defRPr sz="1050">
+                <a:solidFill>
+                  <a:srgbClr val="1B2333"/>
+                </a:solidFill>
+                <a:latin typeface="Menlo"/>
+              </a:defRPr>
+            </a:pPr>
+            <a:r>
+              <a:t>        _start_recording(subject, region)</a:t>
+            </a:r>
+          </a:p>
+          <a:p>
+            <a:pPr>
+              <a:defRPr sz="1050">
+                <a:solidFill>
+                  <a:srgbClr val="1B2333"/>
+                </a:solidFill>
+                <a:latin typeface="Menlo"/>
+              </a:defRPr>
+            </a:pPr>
+            <a:r>
+              <a:t>        output = subject.process(stimuli)</a:t>
+            </a:r>
+          </a:p>
+          <a:p>
+            <a:pPr>
+              <a:defRPr sz="1050">
+                <a:solidFill>
+                  <a:srgbClr val="1B2333"/>
+                </a:solidFill>
+                <a:latin typeface="Menlo"/>
+              </a:defRPr>
+            </a:pPr>
+            <a:r>
+              <a:t>        session.emit(StreamEvent(</a:t>
+            </a:r>
+          </a:p>
+          <a:p>
+            <a:pPr>
+              <a:defRPr sz="1050">
+                <a:solidFill>
+                  <a:srgbClr val="1B2333"/>
+                </a:solidFill>
+                <a:latin typeface="Menlo"/>
+              </a:defRPr>
+            </a:pPr>
+            <a:r>
+              <a:t>            channel=channel, payload=output,</a:t>
+            </a:r>
+          </a:p>
+          <a:p>
+            <a:pPr>
+              <a:defRPr sz="1050">
+                <a:solidFill>
+                  <a:srgbClr val="1B2333"/>
+                </a:solidFill>
+                <a:latin typeface="Menlo"/>
+              </a:defRPr>
+            </a:pPr>
+            <a:r>
+              <a:t>            t_ms=event.t_ms))</a:t>
+            </a:r>
+          </a:p>
+          <a:p>
+            <a:pPr>
+              <a:defRPr sz="1050">
+                <a:solidFill>
+                  <a:srgbClr val="1B2333"/>
+                </a:solidFill>
+                <a:latin typeface="Menlo"/>
+              </a:defRPr>
+            </a:pPr>
+            <a:r>
+              <a:t>    event = session.next_input()</a:t>
+            </a:r>
+          </a:p>
+        </p:txBody>
+      </p:sp>
+      <p:pic>
+        <p:nvPicPr>
+          <p:cNvPr id="5" name="streaming_channels.mp4">
+            <a:hlinkClick r:id="" action="ppaction://media"/>
+          </p:cNvPr>
+          <p:cNvPicPr>
+            <a:picLocks noChangeAspect="1"/>
+          </p:cNvPicPr>
+          <p:nvPr>
+            <a:videoFile r:link="rId3"/>
+            <p:extLst>
+              <p:ext uri="{DAA4B4D4-6D71-4841-9C94-3DE7FCFB9230}">
+                <p14:media xmlns:p14="http://schemas.microsoft.com/office/powerpoint/2010/main" r:embed="rId2"/>
+              </p:ext>
+            </p:extLst>
+          </p:nvPr>
+        </p:nvPicPr>
+        <p:blipFill>
+          <a:blip r:embed="rId4"/>
+          <a:stretch>
+            <a:fillRect/>
+          </a:stretch>
+        </p:blipFill>
+        <p:spPr>
+          <a:xfrm>
+            <a:off x="6355080" y="1463040"/>
+            <a:ext cx="5394960" cy="2103120"/>
+          </a:xfrm>
+          <a:prstGeom prst="rect">
+            <a:avLst/>
+          </a:prstGeom>
+        </p:spPr>
+      </p:pic>
+      <p:sp>
+        <p:nvSpPr>
+          <p:cNvPr id="6" name="TextBox 5"/>
+          <p:cNvSpPr txBox="1"/>
+          <p:nvPr/>
+        </p:nvSpPr>
+        <p:spPr>
+          <a:xfrm>
+            <a:off x="6355080" y="3931920"/>
+            <a:ext cx="5394960" cy="1828800"/>
+          </a:xfrm>
+          <a:prstGeom prst="rect">
+            <a:avLst/>
+          </a:prstGeom>
+          <a:noFill/>
+        </p:spPr>
+        <p:txBody>
+          <a:bodyPr wrap="square">
+            <a:spAutoFit/>
+          </a:bodyPr>
+          <a:lstStyle/>
+          <a:p>
+            <a:pPr>
+              <a:defRPr sz="1050">
+                <a:solidFill>
+                  <a:srgbClr val="8792A8"/>
+                </a:solidFill>
+                <a:latin typeface="Menlo"/>
+              </a:defRPr>
+            </a:pPr>
+            <a:r>
+              <a:t># adding the second channel</a:t>
+            </a:r>
+          </a:p>
+          <a:p>
+            <a:pPr>
+              <a:defRPr sz="1050">
+                <a:solidFill>
+                  <a:srgbClr val="1B2333"/>
+                </a:solidFill>
+                <a:latin typeface="Menlo"/>
+              </a:defRPr>
+            </a:pPr>
+          </a:p>
+          <a:p>
+            <a:pPr>
+              <a:defRPr sz="1050">
+                <a:solidFill>
+                  <a:srgbClr val="1B2333"/>
+                </a:solidFill>
+                <a:latin typeface="Menlo"/>
+              </a:defRPr>
+            </a:pPr>
+            <a:r>
+              <a:t>model.start_recording(['video_mid', 'audio_mid'])</a:t>
+            </a:r>
+          </a:p>
+          <a:p>
+            <a:pPr>
+              <a:defRPr sz="1050">
+                <a:solidFill>
+                  <a:srgbClr val="1B2333"/>
+                </a:solidFill>
+                <a:latin typeface="Menlo"/>
+              </a:defRPr>
+            </a:pPr>
+          </a:p>
+          <a:p>
+            <a:pPr>
+              <a:defRPr sz="1050">
+                <a:solidFill>
+                  <a:srgbClr val="8792A8"/>
+                </a:solidFill>
+                <a:latin typeface="Menlo"/>
+              </a:defRPr>
+            </a:pPr>
+            <a:r>
+              <a:t># the loop above is unchanged.</a:t>
+            </a:r>
+          </a:p>
+        </p:txBody>
+      </p:sp>
+      <p:sp>
+        <p:nvSpPr>
+          <p:cNvPr id="7" name="TextBox 6"/>
+          <p:cNvSpPr txBox="1"/>
+          <p:nvPr/>
+        </p:nvSpPr>
+        <p:spPr>
+          <a:xfrm>
+            <a:off x="457200" y="6355080"/>
+            <a:ext cx="11247120" cy="411480"/>
+          </a:xfrm>
+          <a:prstGeom prst="rect">
+            <a:avLst/>
+          </a:prstGeom>
+          <a:noFill/>
+        </p:spPr>
+        <p:txBody>
+          <a:bodyPr wrap="square">
+            <a:spAutoFit/>
+          </a:bodyPr>
+          <a:lstStyle/>
+          <a:p>
+            <a:pPr>
+              <a:defRPr sz="1100" b="0">
+                <a:solidFill>
+                  <a:srgbClr val="8792A8"/>
+                </a:solidFill>
+              </a:defRPr>
+            </a:pPr>
+            <a:r>
+              <a:t>These are the real functions, at the paths in their comments. Variables are shown with the values this run used (window_ms=2000, region='video_mid').</a:t>
+            </a:r>
+          </a:p>
+        </p:txBody>
+      </p:sp>
+    </p:spTree>
+  </p:cSld>
+  <p:clrMapOvr>
+    <a:masterClrMapping/>
+  </p:clrMapOvr>
+  <p:timing>
+    <p:tnLst>
+      <p:par>
+        <p:cTn id="1" dur="indefinite" restart="never" nodeType="tmRoot">
+          <p:childTnLst>
+            <p:video>
+              <p:cMediaNode vol="80000">
+                <p:cTn id="2" fill="hold" display="0">
+                  <p:stCondLst>
+                    <p:cond delay="indefinite"/>
+                  </p:stCondLst>
+                </p:cTn>
+                <p:tgtEl>
+                  <p:spTgt spid="5"/>
+                </p:tgtEl>
+              </p:cMediaNode>
+            </p:video>
+          </p:childTnLst>
+        </p:cTn>
+      </p:par>
+    </p:tnLst>
+  </p:timing>
+</p:sld>
+</file>
+
+<file path=ppt/slides/slide5.xml><?xml version="1.0" encoding="utf-8"?>
+<p:sld xmlns:a="http://schemas.openxmlformats.org/drawingml/2006/main" xmlns:p="http://schemas.openxmlformats.org/presentationml/2006/main" xmlns:r="http://schemas.openxmlformats.org/officeDocument/2006/relationships">
+  <p:cSld>
+    <p:spTree>
+      <p:nvGrpSpPr>
+        <p:cNvPr id="1" name=""/>
+        <p:cNvGrpSpPr/>
+        <p:nvPr/>
+      </p:nvGrpSpPr>
+      <p:grpSpPr/>
+      <p:sp>
+        <p:nvSpPr>
+          <p:cNvPr id="2" name="TextBox 1"/>
+          <p:cNvSpPr txBox="1"/>
+          <p:nvPr/>
+        </p:nvSpPr>
+        <p:spPr>
+          <a:xfrm>
+            <a:off x="457200" y="201168"/>
+            <a:ext cx="11247120" cy="457200"/>
+          </a:xfrm>
+          <a:prstGeom prst="rect">
+            <a:avLst/>
+          </a:prstGeom>
+          <a:noFill/>
+        </p:spPr>
+        <p:txBody>
+          <a:bodyPr wrap="square">
+            <a:spAutoFit/>
+          </a:bodyPr>
+          <a:lstStyle/>
+          <a:p>
+            <a:pPr>
+              <a:defRPr sz="2400" b="1">
+                <a:solidFill>
+                  <a:srgbClr val="1B2333"/>
+                </a:solidFill>
+              </a:defRPr>
+            </a:pPr>
+            <a:r>
               <a:t>Backup: reading three depths at once</a:t>
             </a:r>
           </a:p>
@@ -3592,7 +4154,7 @@
 </p:sld>
 </file>
 
-<file path=ppt/slides/slide5.xml><?xml version="1.0" encoding="utf-8"?>
+<file path=ppt/slides/slide6.xml><?xml version="1.0" encoding="utf-8"?>
 <p:sld xmlns:a="http://schemas.openxmlformats.org/drawingml/2006/main" xmlns:p="http://schemas.openxmlformats.org/presentationml/2006/main" xmlns:r="http://schemas.openxmlformats.org/officeDocument/2006/relationships">
   <p:cSld>
     <p:spTree>

--- a/scripts/streaming_demo_output/streaming_deck.pptx
+++ b/scripts/streaming_demo_output/streaming_deck.pptx
@@ -3232,8 +3232,8 @@
         </p:blipFill>
         <p:spPr>
           <a:xfrm>
-            <a:off x="457200" y="731520"/>
-            <a:ext cx="11247120" cy="4146930"/>
+            <a:off x="2670766" y="713232"/>
+            <a:ext cx="6819987" cy="2514600"/>
           </a:xfrm>
           <a:prstGeom prst="rect">
             <a:avLst/>
@@ -3265,8 +3265,8 @@
         </p:blipFill>
         <p:spPr>
           <a:xfrm>
-            <a:off x="1920240" y="3246120"/>
-            <a:ext cx="8321040" cy="3200400"/>
+            <a:off x="3452412" y="3392424"/>
+            <a:ext cx="5256695" cy="3200399"/>
           </a:xfrm>
           <a:prstGeom prst="rect">
             <a:avLst/>
@@ -3399,8 +3399,8 @@
         </p:blipFill>
         <p:spPr>
           <a:xfrm>
-            <a:off x="548640" y="777240"/>
-            <a:ext cx="11064240" cy="5693522"/>
+            <a:off x="838738" y="749808"/>
+            <a:ext cx="10484043" cy="5394960"/>
           </a:xfrm>
           <a:prstGeom prst="rect">
             <a:avLst/>
@@ -3856,8 +3856,8 @@
         </p:blipFill>
         <p:spPr>
           <a:xfrm>
-            <a:off x="6355080" y="1463040"/>
-            <a:ext cx="5394960" cy="2103120"/>
+            <a:off x="6355080" y="914400"/>
+            <a:ext cx="4505739" cy="2743200"/>
           </a:xfrm>
           <a:prstGeom prst="rect">
             <a:avLst/>
@@ -3872,7 +3872,7 @@
         </p:nvSpPr>
         <p:spPr>
           <a:xfrm>
-            <a:off x="6355080" y="3931920"/>
+            <a:off x="6355080" y="3886200"/>
             <a:ext cx="5394960" cy="1828800"/>
           </a:xfrm>
           <a:prstGeom prst="rect">
@@ -3895,7 +3895,7 @@
               </a:defRPr>
             </a:pPr>
             <a:r>
-              <a:t># adding the second channel</a:t>
+              <a:t># mid-session, at tick 20 (t = 10 s)</a:t>
             </a:r>
           </a:p>
           <a:p>
@@ -3918,7 +3918,7 @@
               </a:defRPr>
             </a:pPr>
             <a:r>
-              <a:t>model.start_recording(['video_mid', 'audio_mid'])</a:t>
+              <a:t>if i &gt;= CONNECT:</a:t>
             </a:r>
           </a:p>
           <a:p>
@@ -3930,18 +3930,70 @@
                 <a:latin typeface="Menlo"/>
               </a:defRPr>
             </a:pPr>
+            <a:r>
+              <a:t>    seg, sr, t_ms = next(audio_iter)</a:t>
+            </a:r>
           </a:p>
           <a:p>
             <a:pPr>
               <a:defRPr sz="1050">
                 <a:solidFill>
+                  <a:srgbClr val="1B2333"/>
+                </a:solidFill>
+                <a:latin typeface="Menlo"/>
+              </a:defRPr>
+            </a:pPr>
+            <a:r>
+              <a:t>    model.start_recording('encoder.layers.5')</a:t>
+            </a:r>
+          </a:p>
+          <a:p>
+            <a:pPr>
+              <a:defRPr sz="1050">
+                <a:solidFill>
+                  <a:srgbClr val="1B2333"/>
+                </a:solidFill>
+                <a:latin typeface="Menlo"/>
+              </a:defRPr>
+            </a:pPr>
+            <a:r>
+              <a:t>    a = model.process(audio_window)</a:t>
+            </a:r>
+          </a:p>
+          <a:p>
+            <a:pPr>
+              <a:defRPr sz="1050">
+                <a:solidFill>
+                  <a:srgbClr val="1B2333"/>
+                </a:solidFill>
+                <a:latin typeface="Menlo"/>
+              </a:defRPr>
+            </a:pPr>
+            <a:r>
+              <a:t>    model.start_recording('video_mid')</a:t>
+            </a:r>
+          </a:p>
+          <a:p>
+            <a:pPr>
+              <a:defRPr sz="1050">
+                <a:solidFill>
+                  <a:srgbClr val="1B2333"/>
+                </a:solidFill>
+                <a:latin typeface="Menlo"/>
+              </a:defRPr>
+            </a:pPr>
+          </a:p>
+          <a:p>
+            <a:pPr>
+              <a:defRPr sz="1050">
+                <a:solidFill>
                   <a:srgbClr val="8792A8"/>
                 </a:solidFill>
                 <a:latin typeface="Menlo"/>
               </a:defRPr>
             </a:pPr>
             <a:r>
-              <a:t># the loop above is unchanged.</a:t>
+              <a:t># 60 video windows, 40 audio windows.</a:t>
             </a:r>
           </a:p>
         </p:txBody>
@@ -4081,8 +4133,8 @@
         </p:blipFill>
         <p:spPr>
           <a:xfrm>
-            <a:off x="2194560" y="868680"/>
-            <a:ext cx="7772400" cy="4663440"/>
+            <a:off x="2788218" y="822960"/>
+            <a:ext cx="6585082" cy="4663440"/>
           </a:xfrm>
           <a:prstGeom prst="rect">
             <a:avLst/>
